--- a/classes/parte-10-seguridad-en-la-nube-y-contenedores/227-seguridad-de-contenedores-docker/clase-227-presentacion.pptx
+++ b/classes/parte-10-seguridad-en-la-nube-y-contenedores/227-seguridad-de-contenedores-docker/clase-227-presentacion.pptx
@@ -17,6 +17,10 @@
     <p:sldId id="265" r:id="rId16"/>
     <p:sldId id="266" r:id="rId17"/>
     <p:sldId id="267" r:id="rId18"/>
+    <p:sldId id="268" r:id="rId19"/>
+    <p:sldId id="269" r:id="rId20"/>
+    <p:sldId id="270" r:id="rId21"/>
+    <p:sldId id="271" r:id="rId22"/>
   </p:sldIdLst>
   <p:sldSz cx="9144000" cy="6858000" type="screen4x3"/>
   <p:notesSz cx="6858000" cy="9144000"/>
@@ -3198,7 +3202,7 @@
                   <a:srgbClr val="0B3D2E"/>
                 </a:solidFill>
               </a:rPr>
-              <a:t>⚠️ Errores comunes</a:t>
+              <a:t>🧪 Laboratorio guiado</a:t>
             </a:r>
           </a:p>
         </p:txBody>
@@ -3236,67 +3240,97 @@
                   <a:srgbClr val="22282E"/>
                 </a:solidFill>
               </a:rPr>
-              <a:t>•  permission denied al escribir en read-only — El proceso necesita escribir; monta un volumen/tmpfs acotado para esa ruta.</a:t>
-            </a:r>
-          </a:p>
-          <a:p>
-            <a:pPr>
-              <a:spcAft>
-                <a:spcPts val="600"/>
-              </a:spcAft>
-            </a:pPr>
-            <a:r>
-              <a:rPr sz="1500">
-                <a:solidFill>
-                  <a:srgbClr val="22282E"/>
-                </a:solidFill>
-              </a:rPr>
-              <a:t>•  Secreto visible en docker history — Se pasó por ENV/ARG o COPY; usa build secrets o inyección en runtime.</a:t>
-            </a:r>
-          </a:p>
-          <a:p>
-            <a:pPr>
-              <a:spcAft>
-                <a:spcPts val="600"/>
-              </a:spcAft>
-            </a:pPr>
-            <a:r>
-              <a:rPr sz="1500">
-                <a:solidFill>
-                  <a:srgbClr val="22282E"/>
-                </a:solidFill>
-              </a:rPr>
-              <a:t>•  Contenedor corre como root sin querer — Falta USER en el Dockerfile; añádelo y ajusta permisos de archivos.</a:t>
-            </a:r>
-          </a:p>
-          <a:p>
-            <a:pPr>
-              <a:spcAft>
-                <a:spcPts val="600"/>
-              </a:spcAft>
-            </a:pPr>
-            <a:r>
-              <a:rPr sz="1500">
-                <a:solidFill>
-                  <a:srgbClr val="22282E"/>
-                </a:solidFill>
-              </a:rPr>
-              <a:t>•  Trivy reporta cientos de CVEs — Imagen base gorda/antigua; cambia a base mínima y actualiza.</a:t>
-            </a:r>
-          </a:p>
-          <a:p>
-            <a:pPr>
-              <a:spcAft>
-                <a:spcPts val="600"/>
-              </a:spcAft>
-            </a:pPr>
-            <a:r>
-              <a:rPr sz="1500">
-                <a:solidFill>
-                  <a:srgbClr val="22282E"/>
-                </a:solidFill>
-              </a:rPr>
-              <a:t>•  --privileged "necesario" para que funcione — Casi nunca lo es; identifica la capability concreta y añádela sola.</a:t>
+              <a:t>•  Ejecuta docker run -it --rm alpine sh y explora los namespaces con lsns desde el host para ver el aislamiento.</a:t>
+            </a:r>
+          </a:p>
+          <a:p>
+            <a:pPr>
+              <a:spcAft>
+                <a:spcPts val="600"/>
+              </a:spcAft>
+            </a:pPr>
+            <a:r>
+              <a:rPr sz="1500">
+                <a:solidFill>
+                  <a:srgbClr val="22282E"/>
+                </a:solidFill>
+              </a:rPr>
+              <a:t>•  Compara en una VM desechable la salida de capsh --print de un contenedor normal y otro --privileged, sin montar discos ni acceder a datos del host. Documenta qué controles se ampliaron y elimina…</a:t>
+            </a:r>
+          </a:p>
+          <a:p>
+            <a:pPr>
+              <a:spcAft>
+                <a:spcPts val="600"/>
+              </a:spcAft>
+            </a:pPr>
+            <a:r>
+              <a:rPr sz="1500">
+                <a:solidFill>
+                  <a:srgbClr val="22282E"/>
+                </a:solidFill>
+              </a:rPr>
+              <a:t>•  Escribe un Dockerfile inseguro (corriendo como root, con secretos en ENV) y pásalo por Hadolint; corrige los hallazgos.</a:t>
+            </a:r>
+          </a:p>
+          <a:p>
+            <a:pPr>
+              <a:spcAft>
+                <a:spcPts val="600"/>
+              </a:spcAft>
+            </a:pPr>
+            <a:r>
+              <a:rPr sz="1500">
+                <a:solidFill>
+                  <a:srgbClr val="22282E"/>
+                </a:solidFill>
+              </a:rPr>
+              <a:t>•  Refactoriza a un multi-stage build con imagen final distroless o scratch, usuario no root (USER 1000) y sin secretos.</a:t>
+            </a:r>
+          </a:p>
+          <a:p>
+            <a:pPr>
+              <a:spcAft>
+                <a:spcPts val="600"/>
+              </a:spcAft>
+            </a:pPr>
+            <a:r>
+              <a:rPr sz="1500">
+                <a:solidFill>
+                  <a:srgbClr val="22282E"/>
+                </a:solidFill>
+              </a:rPr>
+              <a:t>•  Escanea ambas imágenes con trivy image y compara el número de CVEs y el tamaño.</a:t>
+            </a:r>
+          </a:p>
+          <a:p>
+            <a:pPr>
+              <a:spcAft>
+                <a:spcPts val="600"/>
+              </a:spcAft>
+            </a:pPr>
+            <a:r>
+              <a:rPr sz="1500">
+                <a:solidFill>
+                  <a:srgbClr val="22282E"/>
+                </a:solidFill>
+              </a:rPr>
+              <a:t>•  Ejecuta el contenedor endurecido: docker run --read-only --cap-drop=ALL --security-opt=no-new-privileges --user 1000 miimagen.</a:t>
+            </a:r>
+          </a:p>
+          <a:p>
+            <a:pPr>
+              <a:spcAft>
+                <a:spcPts val="600"/>
+              </a:spcAft>
+            </a:pPr>
+            <a:r>
+              <a:rPr sz="1500">
+                <a:solidFill>
+                  <a:srgbClr val="22282E"/>
+                </a:solidFill>
+              </a:rPr>
+              <a:t>•  Audita el host con Docker Bench for Security y corrige al menos tres hallazgos (daemon con TLS, userns-remap, logging).</a:t>
             </a:r>
           </a:p>
         </p:txBody>
@@ -3347,7 +3381,7 @@
                   <a:srgbClr val="0B3D2E"/>
                 </a:solidFill>
               </a:rPr>
-              <a:t>❓ Preguntas frecuentes</a:t>
+              <a:t>✍️ Ejercicios</a:t>
             </a:r>
           </a:p>
         </p:txBody>
@@ -3385,82 +3419,82 @@
                   <a:srgbClr val="22282E"/>
                 </a:solidFill>
               </a:rPr>
-              <a:t>•  ❓ ¿Un contenedor es tan seguro como una máquina virtual?</a:t>
-            </a:r>
-          </a:p>
-          <a:p>
-            <a:pPr>
-              <a:spcAft>
-                <a:spcPts val="600"/>
-              </a:spcAft>
-            </a:pPr>
-            <a:r>
-              <a:rPr sz="1500">
-                <a:solidFill>
-                  <a:srgbClr val="22282E"/>
-                </a:solidFill>
-              </a:rPr>
-              <a:t>•  No. Comparten el kernel del host; una fuga o un contenedor privilegiado pueden comprometer el host. Para aislamiento fuerte se usan sandboxes como gVisor o Kata Containers.</a:t>
-            </a:r>
-          </a:p>
-          <a:p>
-            <a:pPr>
-              <a:spcAft>
-                <a:spcPts val="600"/>
-              </a:spcAft>
-            </a:pPr>
-            <a:r>
-              <a:rPr sz="1500">
-                <a:solidFill>
-                  <a:srgbClr val="22282E"/>
-                </a:solidFill>
-              </a:rPr>
-              <a:t>•  ❓ ¿Por qué correr como no root si el contenedor ya está aislado?</a:t>
-            </a:r>
-          </a:p>
-          <a:p>
-            <a:pPr>
-              <a:spcAft>
-                <a:spcPts val="600"/>
-              </a:spcAft>
-            </a:pPr>
-            <a:r>
-              <a:rPr sz="1500">
-                <a:solidFill>
-                  <a:srgbClr val="22282E"/>
-                </a:solidFill>
-              </a:rPr>
-              <a:t>•  Porque si el atacante escapa del contenedor o explota una capability, ser root dentro facilita el escape hacia el host. El usuario no root reduce el impacto de un compromiso.</a:t>
-            </a:r>
-          </a:p>
-          <a:p>
-            <a:pPr>
-              <a:spcAft>
-                <a:spcPts val="600"/>
-              </a:spcAft>
-            </a:pPr>
-            <a:r>
-              <a:rPr sz="1500">
-                <a:solidFill>
-                  <a:srgbClr val="22282E"/>
-                </a:solidFill>
-              </a:rPr>
-              <a:t>•  ❓ ¿Dónde guardo los secretos si no en el Dockerfile?</a:t>
-            </a:r>
-          </a:p>
-          <a:p>
-            <a:pPr>
-              <a:spcAft>
-                <a:spcPts val="600"/>
-              </a:spcAft>
-            </a:pPr>
-            <a:r>
-              <a:rPr sz="1500">
-                <a:solidFill>
-                  <a:srgbClr val="22282E"/>
-                </a:solidFill>
-              </a:rPr>
-              <a:t>•  Fuera de la imagen: en un gestor de secretos (clase 233), variables inyectadas en runtime o montajes de secretos del orquestador. Nunca en capas de la imagen.</a:t>
+              <a:t>•  Enumera las capabilities por defecto de un contenedor y explica cuáles quitarías.</a:t>
+            </a:r>
+          </a:p>
+          <a:p>
+            <a:pPr>
+              <a:spcAft>
+                <a:spcPts val="600"/>
+              </a:spcAft>
+            </a:pPr>
+            <a:r>
+              <a:rPr sz="1500">
+                <a:solidFill>
+                  <a:srgbClr val="22282E"/>
+                </a:solidFill>
+              </a:rPr>
+              <a:t>•  Convierte una imagen basada en ubuntu a una distroless y mide la reducción de CVEs.</a:t>
+            </a:r>
+          </a:p>
+          <a:p>
+            <a:pPr>
+              <a:spcAft>
+                <a:spcPts val="600"/>
+              </a:spcAft>
+            </a:pPr>
+            <a:r>
+              <a:rPr sz="1500">
+                <a:solidFill>
+                  <a:srgbClr val="22282E"/>
+                </a:solidFill>
+              </a:rPr>
+              <a:t>•  Configura un contenedor con sistema de archivos read-only y un volumen escribible acotado.</a:t>
+            </a:r>
+          </a:p>
+          <a:p>
+            <a:pPr>
+              <a:spcAft>
+                <a:spcPts val="600"/>
+              </a:spcAft>
+            </a:pPr>
+            <a:r>
+              <a:rPr sz="1500">
+                <a:solidFill>
+                  <a:srgbClr val="22282E"/>
+                </a:solidFill>
+              </a:rPr>
+              <a:t>•  Escribe un .dockerignore que evite filtrar .env y .git.</a:t>
+            </a:r>
+          </a:p>
+          <a:p>
+            <a:pPr>
+              <a:spcAft>
+                <a:spcPts val="600"/>
+              </a:spcAft>
+            </a:pPr>
+            <a:r>
+              <a:rPr sz="1500">
+                <a:solidFill>
+                  <a:srgbClr val="22282E"/>
+                </a:solidFill>
+              </a:rPr>
+              <a:t>•  Firma una imagen y verifica su firma antes de desplegar.</a:t>
+            </a:r>
+          </a:p>
+          <a:p>
+            <a:pPr>
+              <a:spcAft>
+                <a:spcPts val="600"/>
+              </a:spcAft>
+            </a:pPr>
+            <a:r>
+              <a:rPr sz="1500">
+                <a:solidFill>
+                  <a:srgbClr val="22282E"/>
+                </a:solidFill>
+              </a:rPr>
+              <a:t>•  Explica por qué un contenedor comprometido puede afectar al host y cómo mitigarlo.</a:t>
             </a:r>
           </a:p>
         </p:txBody>
@@ -3511,7 +3545,7 @@
                   <a:srgbClr val="0B3D2E"/>
                 </a:solidFill>
               </a:rPr>
-              <a:t>🔗 Referencias</a:t>
+              <a:t>📝 Reto verificable</a:t>
             </a:r>
           </a:p>
         </p:txBody>
@@ -3549,71 +3583,623 @@
                   <a:srgbClr val="22282E"/>
                 </a:solidFill>
               </a:rPr>
-              <a:t>•  Liz Rice, Container Security, O'Reilly. &lt;https://www.oreilly.com/library/view/container-security/9781492056690/&gt;</a:t>
-            </a:r>
-          </a:p>
-          <a:p>
-            <a:pPr>
-              <a:spcAft>
-                <a:spcPts val="600"/>
-              </a:spcAft>
-            </a:pPr>
-            <a:r>
-              <a:rPr sz="1500">
-                <a:solidFill>
-                  <a:srgbClr val="22282E"/>
-                </a:solidFill>
-              </a:rPr>
-              <a:t>•  CIS Docker Benchmark. &lt;https://www.cisecurity.org/benchmark/docker&gt;</a:t>
-            </a:r>
-          </a:p>
-          <a:p>
-            <a:pPr>
-              <a:spcAft>
-                <a:spcPts val="600"/>
-              </a:spcAft>
-            </a:pPr>
-            <a:r>
-              <a:rPr sz="1500">
-                <a:solidFill>
-                  <a:srgbClr val="22282E"/>
-                </a:solidFill>
-              </a:rPr>
-              <a:t>•  Trivy. &lt;https://github.com/aquasecurity/trivy&gt;</a:t>
-            </a:r>
-          </a:p>
-          <a:p>
-            <a:pPr>
-              <a:spcAft>
-                <a:spcPts val="600"/>
-              </a:spcAft>
-            </a:pPr>
-            <a:r>
-              <a:rPr sz="1500">
-                <a:solidFill>
-                  <a:srgbClr val="22282E"/>
-                </a:solidFill>
-              </a:rPr>
-              <a:t>•  Docker Bench for Security. &lt;https://github.com/docker/docker-bench-security&gt;</a:t>
-            </a:r>
-          </a:p>
-          <a:p>
-            <a:pPr>
-              <a:spcAft>
-                <a:spcPts val="600"/>
-              </a:spcAft>
-            </a:pPr>
-            <a:r>
-              <a:rPr sz="1500">
-                <a:solidFill>
-                  <a:srgbClr val="22282E"/>
-                </a:solidFill>
-              </a:rPr>
-              <a:t>•  NIST SP 800-190, Application Container Security Guide. &lt;https://csrc.nist.gov/pubs/sp/800/190/final&gt;</a:t>
-            </a:r>
-          </a:p>
-        </p:txBody>
-      </p:sp>
+              <a:t>•  Toma una imagen de aplicación real y prodúcela endurecida: multi-stage, base mínima, usuario no root,</a:t>
+            </a:r>
+          </a:p>
+          <a:p>
+            <a:pPr>
+              <a:spcAft>
+                <a:spcPts val="600"/>
+              </a:spcAft>
+            </a:pPr>
+            <a:r>
+              <a:rPr sz="1500">
+                <a:solidFill>
+                  <a:srgbClr val="22282E"/>
+                </a:solidFill>
+              </a:rPr>
+              <a:t>•  sin secretos, y ejecución con capabilities recortadas y read-only.</a:t>
+            </a:r>
+          </a:p>
+          <a:p>
+            <a:pPr>
+              <a:spcAft>
+                <a:spcPts val="600"/>
+              </a:spcAft>
+            </a:pPr>
+            <a:r>
+              <a:rPr sz="1500">
+                <a:solidFill>
+                  <a:srgbClr val="22282E"/>
+                </a:solidFill>
+              </a:rPr>
+              <a:t>•  Criterio de aceptación: trivy image no reporta CVEs CRÍTICAS ni secretos en la imagen final, la</a:t>
+            </a:r>
+          </a:p>
+          <a:p>
+            <a:pPr>
+              <a:spcAft>
+                <a:spcPts val="600"/>
+              </a:spcAft>
+            </a:pPr>
+            <a:r>
+              <a:rPr sz="1500">
+                <a:solidFill>
+                  <a:srgbClr val="22282E"/>
+                </a:solidFill>
+              </a:rPr>
+              <a:t>•  imagen corre como UID no root, y docker inspect confirma CapDrop: [ALL] y ReadonlyRootfs: true.</a:t>
+            </a:r>
+          </a:p>
+        </p:txBody>
+      </p:sp>
+    </p:spTree>
+  </p:cSld>
+  <p:clrMapOvr>
+    <a:masterClrMapping/>
+  </p:clrMapOvr>
+</p:sld>
+</file>
+
+<file path=ppt/slides/slide13.xml><?xml version="1.0" encoding="utf-8"?>
+<p:sld xmlns:a="http://schemas.openxmlformats.org/drawingml/2006/main" xmlns:p="http://schemas.openxmlformats.org/presentationml/2006/main" xmlns:r="http://schemas.openxmlformats.org/officeDocument/2006/relationships">
+  <p:cSld>
+    <p:spTree>
+      <p:nvGrpSpPr>
+        <p:cNvPr id="1" name=""/>
+        <p:cNvGrpSpPr/>
+        <p:nvPr/>
+      </p:nvGrpSpPr>
+      <p:grpSpPr/>
+      <p:sp>
+        <p:nvSpPr>
+          <p:cNvPr id="2" name="TextBox 1"/>
+          <p:cNvSpPr txBox="1"/>
+          <p:nvPr/>
+        </p:nvSpPr>
+        <p:spPr>
+          <a:xfrm>
+            <a:off x="457200" y="320040"/>
+            <a:ext cx="8229600" cy="822960"/>
+          </a:xfrm>
+          <a:prstGeom prst="rect">
+            <a:avLst/>
+          </a:prstGeom>
+          <a:noFill/>
+        </p:spPr>
+        <p:txBody>
+          <a:bodyPr wrap="square">
+            <a:spAutoFit/>
+          </a:bodyPr>
+          <a:lstStyle/>
+          <a:p>
+            <a:r>
+              <a:rPr sz="2600" b="1">
+                <a:solidFill>
+                  <a:srgbClr val="0B3D2E"/>
+                </a:solidFill>
+              </a:rPr>
+              <a:t>⚠️ Errores comunes</a:t>
+            </a:r>
+          </a:p>
+        </p:txBody>
+      </p:sp>
+      <p:sp>
+        <p:nvSpPr>
+          <p:cNvPr id="3" name="TextBox 2"/>
+          <p:cNvSpPr txBox="1"/>
+          <p:nvPr/>
+        </p:nvSpPr>
+        <p:spPr>
+          <a:xfrm>
+            <a:off x="457200" y="1280160"/>
+            <a:ext cx="8229600" cy="4937760"/>
+          </a:xfrm>
+          <a:prstGeom prst="rect">
+            <a:avLst/>
+          </a:prstGeom>
+          <a:noFill/>
+        </p:spPr>
+        <p:txBody>
+          <a:bodyPr wrap="square">
+            <a:spAutoFit/>
+          </a:bodyPr>
+          <a:lstStyle/>
+          <a:p>
+            <a:pPr>
+              <a:spcAft>
+                <a:spcPts val="600"/>
+              </a:spcAft>
+            </a:pPr>
+            <a:r>
+              <a:rPr sz="1500">
+                <a:solidFill>
+                  <a:srgbClr val="22282E"/>
+                </a:solidFill>
+              </a:rPr>
+              <a:t>•  permission denied al escribir en read-only — El proceso necesita escribir; monta un volumen/tmpfs acotado para esa ruta.</a:t>
+            </a:r>
+          </a:p>
+          <a:p>
+            <a:pPr>
+              <a:spcAft>
+                <a:spcPts val="600"/>
+              </a:spcAft>
+            </a:pPr>
+            <a:r>
+              <a:rPr sz="1500">
+                <a:solidFill>
+                  <a:srgbClr val="22282E"/>
+                </a:solidFill>
+              </a:rPr>
+              <a:t>•  Secreto visible en docker history — Se pasó por ENV/ARG o COPY; usa build secrets o inyección en runtime.</a:t>
+            </a:r>
+          </a:p>
+          <a:p>
+            <a:pPr>
+              <a:spcAft>
+                <a:spcPts val="600"/>
+              </a:spcAft>
+            </a:pPr>
+            <a:r>
+              <a:rPr sz="1500">
+                <a:solidFill>
+                  <a:srgbClr val="22282E"/>
+                </a:solidFill>
+              </a:rPr>
+              <a:t>•  Contenedor corre como root sin querer — Falta USER en el Dockerfile; añádelo y ajusta permisos de archivos.</a:t>
+            </a:r>
+          </a:p>
+          <a:p>
+            <a:pPr>
+              <a:spcAft>
+                <a:spcPts val="600"/>
+              </a:spcAft>
+            </a:pPr>
+            <a:r>
+              <a:rPr sz="1500">
+                <a:solidFill>
+                  <a:srgbClr val="22282E"/>
+                </a:solidFill>
+              </a:rPr>
+              <a:t>•  Trivy reporta cientos de CVEs — Imagen base gorda/antigua; cambia a base mínima y actualiza.</a:t>
+            </a:r>
+          </a:p>
+          <a:p>
+            <a:pPr>
+              <a:spcAft>
+                <a:spcPts val="600"/>
+              </a:spcAft>
+            </a:pPr>
+            <a:r>
+              <a:rPr sz="1500">
+                <a:solidFill>
+                  <a:srgbClr val="22282E"/>
+                </a:solidFill>
+              </a:rPr>
+              <a:t>•  --privileged "necesario" para que funcione — No se identificó la operación requerida. Traza el fallo y concede solo capability, dispositivo o mount estrictamente justificado.</a:t>
+            </a:r>
+          </a:p>
+        </p:txBody>
+      </p:sp>
+    </p:spTree>
+  </p:cSld>
+  <p:clrMapOvr>
+    <a:masterClrMapping/>
+  </p:clrMapOvr>
+</p:sld>
+</file>
+
+<file path=ppt/slides/slide14.xml><?xml version="1.0" encoding="utf-8"?>
+<p:sld xmlns:a="http://schemas.openxmlformats.org/drawingml/2006/main" xmlns:p="http://schemas.openxmlformats.org/presentationml/2006/main" xmlns:r="http://schemas.openxmlformats.org/officeDocument/2006/relationships">
+  <p:cSld>
+    <p:spTree>
+      <p:nvGrpSpPr>
+        <p:cNvPr id="1" name=""/>
+        <p:cNvGrpSpPr/>
+        <p:nvPr/>
+      </p:nvGrpSpPr>
+      <p:grpSpPr/>
+      <p:sp>
+        <p:nvSpPr>
+          <p:cNvPr id="2" name="TextBox 1"/>
+          <p:cNvSpPr txBox="1"/>
+          <p:nvPr/>
+        </p:nvSpPr>
+        <p:spPr>
+          <a:xfrm>
+            <a:off x="457200" y="320040"/>
+            <a:ext cx="8229600" cy="822960"/>
+          </a:xfrm>
+          <a:prstGeom prst="rect">
+            <a:avLst/>
+          </a:prstGeom>
+          <a:noFill/>
+        </p:spPr>
+        <p:txBody>
+          <a:bodyPr wrap="square">
+            <a:spAutoFit/>
+          </a:bodyPr>
+          <a:lstStyle/>
+          <a:p>
+            <a:r>
+              <a:rPr sz="2600" b="1">
+                <a:solidFill>
+                  <a:srgbClr val="0B3D2E"/>
+                </a:solidFill>
+              </a:rPr>
+              <a:t>❓ Preguntas frecuentes</a:t>
+            </a:r>
+          </a:p>
+        </p:txBody>
+      </p:sp>
+      <p:sp>
+        <p:nvSpPr>
+          <p:cNvPr id="3" name="TextBox 2"/>
+          <p:cNvSpPr txBox="1"/>
+          <p:nvPr/>
+        </p:nvSpPr>
+        <p:spPr>
+          <a:xfrm>
+            <a:off x="457200" y="1280160"/>
+            <a:ext cx="8229600" cy="4937760"/>
+          </a:xfrm>
+          <a:prstGeom prst="rect">
+            <a:avLst/>
+          </a:prstGeom>
+          <a:noFill/>
+        </p:spPr>
+        <p:txBody>
+          <a:bodyPr wrap="square">
+            <a:spAutoFit/>
+          </a:bodyPr>
+          <a:lstStyle/>
+          <a:p>
+            <a:pPr>
+              <a:spcAft>
+                <a:spcPts val="600"/>
+              </a:spcAft>
+            </a:pPr>
+            <a:r>
+              <a:rPr sz="1500">
+                <a:solidFill>
+                  <a:srgbClr val="22282E"/>
+                </a:solidFill>
+              </a:rPr>
+              <a:t>•  ❓ ¿Un contenedor es tan seguro como una máquina virtual?</a:t>
+            </a:r>
+          </a:p>
+          <a:p>
+            <a:pPr>
+              <a:spcAft>
+                <a:spcPts val="600"/>
+              </a:spcAft>
+            </a:pPr>
+            <a:r>
+              <a:rPr sz="1500">
+                <a:solidFill>
+                  <a:srgbClr val="22282E"/>
+                </a:solidFill>
+              </a:rPr>
+              <a:t>•  No. Comparten el kernel del host; una fuga o un contenedor privilegiado pueden comprometer el host. Para aislamiento fuerte se usan sandboxes como gVisor o Kata Containers.</a:t>
+            </a:r>
+          </a:p>
+          <a:p>
+            <a:pPr>
+              <a:spcAft>
+                <a:spcPts val="600"/>
+              </a:spcAft>
+            </a:pPr>
+            <a:r>
+              <a:rPr sz="1500">
+                <a:solidFill>
+                  <a:srgbClr val="22282E"/>
+                </a:solidFill>
+              </a:rPr>
+              <a:t>•  ❓ ¿Por qué correr como no root si el contenedor ya está aislado?</a:t>
+            </a:r>
+          </a:p>
+          <a:p>
+            <a:pPr>
+              <a:spcAft>
+                <a:spcPts val="600"/>
+              </a:spcAft>
+            </a:pPr>
+            <a:r>
+              <a:rPr sz="1500">
+                <a:solidFill>
+                  <a:srgbClr val="22282E"/>
+                </a:solidFill>
+              </a:rPr>
+              <a:t>•  Porque si el atacante escapa del contenedor o explota una capability, ser root dentro facilita el escape hacia el host. El usuario no root reduce el impacto de un compromiso.</a:t>
+            </a:r>
+          </a:p>
+          <a:p>
+            <a:pPr>
+              <a:spcAft>
+                <a:spcPts val="600"/>
+              </a:spcAft>
+            </a:pPr>
+            <a:r>
+              <a:rPr sz="1500">
+                <a:solidFill>
+                  <a:srgbClr val="22282E"/>
+                </a:solidFill>
+              </a:rPr>
+              <a:t>•  ❓ ¿Dónde guardo los secretos si no en el Dockerfile?</a:t>
+            </a:r>
+          </a:p>
+          <a:p>
+            <a:pPr>
+              <a:spcAft>
+                <a:spcPts val="600"/>
+              </a:spcAft>
+            </a:pPr>
+            <a:r>
+              <a:rPr sz="1500">
+                <a:solidFill>
+                  <a:srgbClr val="22282E"/>
+                </a:solidFill>
+              </a:rPr>
+              <a:t>•  Fuera de las capas de imagen, mediante un gestor y una identidad de carga. La entrega en runtime también debe evitar exposición en variables, comandos, logs, dumps y archivos con permisos amplios.</a:t>
+            </a:r>
+          </a:p>
+        </p:txBody>
+      </p:sp>
+    </p:spTree>
+  </p:cSld>
+  <p:clrMapOvr>
+    <a:masterClrMapping/>
+  </p:clrMapOvr>
+</p:sld>
+</file>
+
+<file path=ppt/slides/slide15.xml><?xml version="1.0" encoding="utf-8"?>
+<p:sld xmlns:a="http://schemas.openxmlformats.org/drawingml/2006/main" xmlns:p="http://schemas.openxmlformats.org/presentationml/2006/main" xmlns:r="http://schemas.openxmlformats.org/officeDocument/2006/relationships">
+  <p:cSld>
+    <p:spTree>
+      <p:nvGrpSpPr>
+        <p:cNvPr id="1" name=""/>
+        <p:cNvGrpSpPr/>
+        <p:nvPr/>
+      </p:nvGrpSpPr>
+      <p:grpSpPr/>
+      <p:sp>
+        <p:nvSpPr>
+          <p:cNvPr id="2" name="TextBox 1"/>
+          <p:cNvSpPr txBox="1"/>
+          <p:nvPr/>
+        </p:nvSpPr>
+        <p:spPr>
+          <a:xfrm>
+            <a:off x="457200" y="320040"/>
+            <a:ext cx="8229600" cy="822960"/>
+          </a:xfrm>
+          <a:prstGeom prst="rect">
+            <a:avLst/>
+          </a:prstGeom>
+          <a:noFill/>
+        </p:spPr>
+        <p:txBody>
+          <a:bodyPr wrap="square">
+            <a:spAutoFit/>
+          </a:bodyPr>
+          <a:lstStyle/>
+          <a:p>
+            <a:r>
+              <a:rPr sz="2600" b="1">
+                <a:solidFill>
+                  <a:srgbClr val="0B3D2E"/>
+                </a:solidFill>
+              </a:rPr>
+              <a:t>🔗 Referencias verificables y alcance</a:t>
+            </a:r>
+          </a:p>
+        </p:txBody>
+      </p:sp>
+      <p:sp>
+        <p:nvSpPr>
+          <p:cNvPr id="3" name="TextBox 2"/>
+          <p:cNvSpPr txBox="1"/>
+          <p:nvPr/>
+        </p:nvSpPr>
+        <p:spPr>
+          <a:xfrm>
+            <a:off x="457200" y="1280160"/>
+            <a:ext cx="8229600" cy="4937760"/>
+          </a:xfrm>
+          <a:prstGeom prst="rect">
+            <a:avLst/>
+          </a:prstGeom>
+          <a:noFill/>
+        </p:spPr>
+        <p:txBody>
+          <a:bodyPr wrap="square">
+            <a:spAutoFit/>
+          </a:bodyPr>
+          <a:lstStyle/>
+          <a:p>
+            <a:pPr>
+              <a:spcAft>
+                <a:spcPts val="600"/>
+              </a:spcAft>
+            </a:pPr>
+            <a:r>
+              <a:rPr sz="1500">
+                <a:solidFill>
+                  <a:srgbClr val="22282E"/>
+                </a:solidFill>
+              </a:rPr>
+              <a:t>•  Docker Engine security. &lt;https://docs.docker.com/engine/security/&gt; — documentación oficial de namespaces, daemon, capabilities y user namespaces.</a:t>
+            </a:r>
+          </a:p>
+          <a:p>
+            <a:pPr>
+              <a:spcAft>
+                <a:spcPts val="600"/>
+              </a:spcAft>
+            </a:pPr>
+            <a:r>
+              <a:rPr sz="1500">
+                <a:solidFill>
+                  <a:srgbClr val="22282E"/>
+                </a:solidFill>
+              </a:rPr>
+              <a:t>•  Docker seccomp profiles. &lt;https://docs.docker.com/engine/security/seccomp/&gt; — comportamiento oficial del perfil predeterminado y excepciones.</a:t>
+            </a:r>
+          </a:p>
+          <a:p>
+            <a:pPr>
+              <a:spcAft>
+                <a:spcPts val="600"/>
+              </a:spcAft>
+            </a:pPr>
+            <a:r>
+              <a:rPr sz="1500">
+                <a:solidFill>
+                  <a:srgbClr val="22282E"/>
+                </a:solidFill>
+              </a:rPr>
+              <a:t>•  NIST SP 800-190. &lt;https://doi.org/10.6028/NIST.SP.800-190&gt; — riesgos y recomendaciones de ciclo de vida de contenedores.</a:t>
+            </a:r>
+          </a:p>
+          <a:p>
+            <a:pPr>
+              <a:spcAft>
+                <a:spcPts val="600"/>
+              </a:spcAft>
+            </a:pPr>
+            <a:r>
+              <a:rPr sz="1500">
+                <a:solidFill>
+                  <a:srgbClr val="22282E"/>
+                </a:solidFill>
+              </a:rPr>
+              <a:t>•  CIS Docker Benchmark. &lt;https://www.cisecurity.org/benchmark/docker&gt; — baseline versionada; comprobar aplicabilidad al runtime y distribución.</a:t>
+            </a:r>
+          </a:p>
+          <a:p>
+            <a:pPr>
+              <a:spcAft>
+                <a:spcPts val="600"/>
+              </a:spcAft>
+            </a:pPr>
+            <a:r>
+              <a:rPr sz="1500">
+                <a:solidFill>
+                  <a:srgbClr val="22282E"/>
+                </a:solidFill>
+              </a:rPr>
+              <a:t>•  Docker Bench for Security. &lt;https://github.com/docker/docker-bench-security&gt; — automatiza una selección de checks CIS; documentar versión, host y pruebas no ejecutables.</a:t>
+            </a:r>
+          </a:p>
+          <a:p>
+            <a:pPr>
+              <a:spcAft>
+                <a:spcPts val="600"/>
+              </a:spcAft>
+            </a:pPr>
+            <a:r>
+              <a:rPr sz="1500">
+                <a:solidFill>
+                  <a:srgbClr val="22282E"/>
+                </a:solidFill>
+              </a:rPr>
+              <a:t>•  Trivy. &lt;https://github.com/aquasecurity/trivy&gt; — proyecto primario de escaneo; interpretar base, alcance y configuración.</a:t>
+            </a:r>
+          </a:p>
+          <a:p>
+            <a:pPr>
+              <a:spcAft>
+                <a:spcPts val="600"/>
+              </a:spcAft>
+            </a:pPr>
+            <a:r>
+              <a:rPr sz="1500">
+                <a:solidFill>
+                  <a:srgbClr val="22282E"/>
+                </a:solidFill>
+              </a:rPr>
+              <a:t>•  Liz Rice, Container Security. &lt;https://www.oreilly.com/library/view/container-security/9781492056690/&gt; — explicación complementaria de mecanismos Linux.</a:t>
+            </a:r>
+          </a:p>
+        </p:txBody>
+      </p:sp>
+    </p:spTree>
+  </p:cSld>
+  <p:clrMapOvr>
+    <a:masterClrMapping/>
+  </p:clrMapOvr>
+</p:sld>
+</file>
+
+<file path=ppt/slides/slide16.xml><?xml version="1.0" encoding="utf-8"?>
+<p:sld xmlns:a="http://schemas.openxmlformats.org/drawingml/2006/main" xmlns:p="http://schemas.openxmlformats.org/presentationml/2006/main" xmlns:r="http://schemas.openxmlformats.org/officeDocument/2006/relationships">
+  <p:cSld>
+    <p:spTree>
+      <p:nvGrpSpPr>
+        <p:cNvPr id="1" name=""/>
+        <p:cNvGrpSpPr/>
+        <p:nvPr/>
+      </p:nvGrpSpPr>
+      <p:grpSpPr/>
+      <p:sp>
+        <p:nvSpPr>
+          <p:cNvPr id="2" name="TextBox 1"/>
+          <p:cNvSpPr txBox="1"/>
+          <p:nvPr/>
+        </p:nvSpPr>
+        <p:spPr>
+          <a:xfrm>
+            <a:off x="457200" y="274320"/>
+            <a:ext cx="8229600" cy="640080"/>
+          </a:xfrm>
+          <a:prstGeom prst="rect">
+            <a:avLst/>
+          </a:prstGeom>
+          <a:noFill/>
+        </p:spPr>
+        <p:txBody>
+          <a:bodyPr wrap="square">
+            <a:spAutoFit/>
+          </a:bodyPr>
+          <a:lstStyle/>
+          <a:p>
+            <a:r>
+              <a:rPr sz="2200" b="1">
+                <a:solidFill>
+                  <a:srgbClr val="0B3D2E"/>
+                </a:solidFill>
+              </a:rPr>
+              <a:t>Diagrama de la clase</a:t>
+            </a:r>
+          </a:p>
+        </p:txBody>
+      </p:sp>
+      <p:pic>
+        <p:nvPicPr>
+          <p:cNvPr id="3" name="Picture 2" descr="0abdb3bb99f3c021.png"/>
+          <p:cNvPicPr>
+            <a:picLocks noChangeAspect="1"/>
+          </p:cNvPicPr>
+          <p:nvPr/>
+        </p:nvPicPr>
+        <p:blipFill>
+          <a:blip r:embed="rId2"/>
+          <a:stretch>
+            <a:fillRect/>
+          </a:stretch>
+        </p:blipFill>
+        <p:spPr>
+          <a:xfrm>
+            <a:off x="1530696" y="1097280"/>
+            <a:ext cx="6082608" cy="5303520"/>
+          </a:xfrm>
+          <a:prstGeom prst="rect">
+            <a:avLst/>
+          </a:prstGeom>
+        </p:spPr>
+      </p:pic>
     </p:spTree>
   </p:cSld>
   <p:clrMapOvr>
@@ -4137,7 +4723,7 @@
                   <a:srgbClr val="0B3D2E"/>
                 </a:solidFill>
               </a:rPr>
-              <a:t>📖 Definiciones y características</a:t>
+              <a:t>🧠 Explicación en profundidad</a:t>
             </a:r>
           </a:p>
         </p:txBody>
@@ -4175,97 +4761,97 @@
                   <a:srgbClr val="22282E"/>
                 </a:solidFill>
               </a:rPr>
-              <a:t>•  Namespace: aísla la vista de un proceso (PID, red, montajes, usuarios). Clave: es el mecanismo central de aislamiento del contenedor.</a:t>
-            </a:r>
-          </a:p>
-          <a:p>
-            <a:pPr>
-              <a:spcAft>
-                <a:spcPts val="600"/>
-              </a:spcAft>
-            </a:pPr>
-            <a:r>
-              <a:rPr sz="1500">
-                <a:solidFill>
-                  <a:srgbClr val="22282E"/>
-                </a:solidFill>
-              </a:rPr>
-              <a:t>•  cgroup: limita recursos (CPU, memoria, PIDs). Clave: previene abuso de recursos y algunas denegaciones de servicio.</a:t>
-            </a:r>
-          </a:p>
-          <a:p>
-            <a:pPr>
-              <a:spcAft>
-                <a:spcPts val="600"/>
-              </a:spcAft>
-            </a:pPr>
-            <a:r>
-              <a:rPr sz="1500">
-                <a:solidFill>
-                  <a:srgbClr val="22282E"/>
-                </a:solidFill>
-              </a:rPr>
-              <a:t>•  Capability: privilegio granular del kernel (p. ej. CAPNETADMIN). Clave: recórtalas con --cap-drop=ALL y añade solo las necesarias.</a:t>
-            </a:r>
-          </a:p>
-          <a:p>
-            <a:pPr>
-              <a:spcAft>
-                <a:spcPts val="600"/>
-              </a:spcAft>
-            </a:pPr>
-            <a:r>
-              <a:rPr sz="1500">
-                <a:solidFill>
-                  <a:srgbClr val="22282E"/>
-                </a:solidFill>
-              </a:rPr>
-              <a:t>•  Contenedor privilegiado: --privileged desactiva casi todo el aislamiento. Clave: casi equivale a root en el host; evítalo.</a:t>
-            </a:r>
-          </a:p>
-          <a:p>
-            <a:pPr>
-              <a:spcAft>
-                <a:spcPts val="600"/>
-              </a:spcAft>
-            </a:pPr>
-            <a:r>
-              <a:rPr sz="1500">
-                <a:solidFill>
-                  <a:srgbClr val="22282E"/>
-                </a:solidFill>
-              </a:rPr>
-              <a:t>•  Multi-stage build: compilar en una etapa y copiar solo el artefacto a una imagen mínima. Clave: elimina toolchain y secretos de la imagen final.</a:t>
-            </a:r>
-          </a:p>
-          <a:p>
-            <a:pPr>
-              <a:spcAft>
-                <a:spcPts val="600"/>
-              </a:spcAft>
-            </a:pPr>
-            <a:r>
-              <a:rPr sz="1500">
-                <a:solidFill>
-                  <a:srgbClr val="22282E"/>
-                </a:solidFill>
-              </a:rPr>
-              <a:t>•  Distroless / scratch: imágenes base sin shell ni gestor de paquetes. Clave: reducen superficie de ataque.</a:t>
-            </a:r>
-          </a:p>
-          <a:p>
-            <a:pPr>
-              <a:spcAft>
-                <a:spcPts val="600"/>
-              </a:spcAft>
-            </a:pPr>
-            <a:r>
-              <a:rPr sz="1500">
-                <a:solidFill>
-                  <a:srgbClr val="22282E"/>
-                </a:solidFill>
-              </a:rPr>
-              <a:t>•  Seccomp: filtra syscalls disponibles al contenedor. Clave: el perfil por defecto ya bloquea syscalls peligrosas.</a:t>
+              <a:t>•  Un contenedor es un conjunto de procesos aislados mediante mecanismos del kernel y empaquetados con un filesystem. No posee un kernel independiente como una VM convencional. Por eso el riesgo depende…</a:t>
+            </a:r>
+          </a:p>
+          <a:p>
+            <a:pPr>
+              <a:spcAft>
+                <a:spcPts val="600"/>
+              </a:spcAft>
+            </a:pPr>
+            <a:r>
+              <a:rPr sz="1500">
+                <a:solidFill>
+                  <a:srgbClr val="22282E"/>
+                </a:solidFill>
+              </a:rPr>
+              <a:t>•  El diagrama recorre dos vidas: cadena de suministro y runtime. Una imagen sin CVE conocida puede ejecutarse con --privileged y mounts peligrosos; una configuración restrictiva no corrige una…</a:t>
+            </a:r>
+          </a:p>
+          <a:p>
+            <a:pPr>
+              <a:spcAft>
+                <a:spcPts val="600"/>
+              </a:spcAft>
+            </a:pPr>
+            <a:r>
+              <a:rPr sz="1500">
+                <a:solidFill>
+                  <a:srgbClr val="22282E"/>
+                </a:solidFill>
+              </a:rPr>
+              <a:t>•  Namespaces separan vistas de PID, red, montajes, IPC, hostname y usuarios; cgroups limitan y contabilizan recursos. Capabilities dividen privilegios de root, pero algunas como SYSADMIN abarcan…</a:t>
+            </a:r>
+          </a:p>
+          <a:p>
+            <a:pPr>
+              <a:spcAft>
+                <a:spcPts val="600"/>
+              </a:spcAft>
+            </a:pPr>
+            <a:r>
+              <a:rPr sz="1500">
+                <a:solidFill>
+                  <a:srgbClr val="22282E"/>
+                </a:solidFill>
+              </a:rPr>
+              <a:t>•  --privileged amplía dispositivos y capabilities y relaja controles; no debe describirse simplemente como «root del host», porque el resultado depende de mounts, kernel y runtime, pero rompe buena…</a:t>
+            </a:r>
+          </a:p>
+          <a:p>
+            <a:pPr>
+              <a:spcAft>
+                <a:spcPts val="600"/>
+              </a:spcAft>
+            </a:pPr>
+            <a:r>
+              <a:rPr sz="1500">
+                <a:solidFill>
+                  <a:srgbClr val="22282E"/>
+                </a:solidFill>
+              </a:rPr>
+              <a:t>•  Cada instrucción de build puede crear capas recuperables. Borrar un secreto en una capa posterior no elimina el contenido anterior. BuildKit secrets permiten montar material durante un paso sin…</a:t>
+            </a:r>
+          </a:p>
+          <a:p>
+            <a:pPr>
+              <a:spcAft>
+                <a:spcPts val="600"/>
+              </a:spcAft>
+            </a:pPr>
+            <a:r>
+              <a:rPr sz="1500">
+                <a:solidFill>
+                  <a:srgbClr val="22282E"/>
+                </a:solidFill>
+              </a:rPr>
+              <a:t>•  El escáner relaciona paquetes con bases de vulnerabilidades y puede producir falsos positivos o carecer de contexto de explotabilidad. Se conserva versión, base, digest y política de excepción. La…</a:t>
+            </a:r>
+          </a:p>
+          <a:p>
+            <a:pPr>
+              <a:spcAft>
+                <a:spcPts val="600"/>
+              </a:spcAft>
+            </a:pPr>
+            <a:r>
+              <a:rPr sz="1500">
+                <a:solidFill>
+                  <a:srgbClr val="22282E"/>
+                </a:solidFill>
+              </a:rPr>
+              <a:t>•  Se ejecuta como usuario no root, filesystem de solo lectura, capabilities eliminadas y recursos limitados. Docker aplica un perfil seccomp predeterminado cuando la plataforma lo soporta; AppArmor o…</a:t>
             </a:r>
           </a:p>
         </p:txBody>
@@ -4316,7 +4902,7 @@
                   <a:srgbClr val="0B3D2E"/>
                 </a:solidFill>
               </a:rPr>
-              <a:t>🧰 Herramientas y preparación</a:t>
+              <a:t>📖 Definiciones y características</a:t>
             </a:r>
           </a:p>
         </p:txBody>
@@ -4354,82 +4940,97 @@
                   <a:srgbClr val="22282E"/>
                 </a:solidFill>
               </a:rPr>
-              <a:t>•  Docker Engine en un host Linux de laboratorio.</a:t>
-            </a:r>
-          </a:p>
-          <a:p>
-            <a:pPr>
-              <a:spcAft>
-                <a:spcPts val="600"/>
-              </a:spcAft>
-            </a:pPr>
-            <a:r>
-              <a:rPr sz="1500">
-                <a:solidFill>
-                  <a:srgbClr val="22282E"/>
-                </a:solidFill>
-              </a:rPr>
-              <a:t>•  Trivy para escaneo de imágenes/filesystem: docker run aquasec/trivy.</a:t>
-            </a:r>
-          </a:p>
-          <a:p>
-            <a:pPr>
-              <a:spcAft>
-                <a:spcPts val="600"/>
-              </a:spcAft>
-            </a:pPr>
-            <a:r>
-              <a:rPr sz="1500">
-                <a:solidFill>
-                  <a:srgbClr val="22282E"/>
-                </a:solidFill>
-              </a:rPr>
-              <a:t>•  Docker Bench for Security para auditar el host según CIS.</a:t>
-            </a:r>
-          </a:p>
-          <a:p>
-            <a:pPr>
-              <a:spcAft>
-                <a:spcPts val="600"/>
-              </a:spcAft>
-            </a:pPr>
-            <a:r>
-              <a:rPr sz="1500">
-                <a:solidFill>
-                  <a:srgbClr val="22282E"/>
-                </a:solidFill>
-              </a:rPr>
-              <a:t>•  Hadolint para lint de Dockerfiles.</a:t>
-            </a:r>
-          </a:p>
-          <a:p>
-            <a:pPr>
-              <a:spcAft>
-                <a:spcPts val="600"/>
-              </a:spcAft>
-            </a:pPr>
-            <a:r>
-              <a:rPr sz="1500">
-                <a:solidFill>
-                  <a:srgbClr val="22282E"/>
-                </a:solidFill>
-              </a:rPr>
-              <a:t>•  trivy image --severity HIGH,CRITICAL nginx:latest</a:t>
-            </a:r>
-          </a:p>
-          <a:p>
-            <a:pPr>
-              <a:spcAft>
-                <a:spcPts val="600"/>
-              </a:spcAft>
-            </a:pPr>
-            <a:r>
-              <a:rPr sz="1500">
-                <a:solidFill>
-                  <a:srgbClr val="22282E"/>
-                </a:solidFill>
-              </a:rPr>
-              <a:t>•  docker inspect --format '{{ .HostConfig.CapAdd }} {{ .HostConfig.SecurityOpt }}' micontenedor</a:t>
+              <a:t>•  Namespace: aísla la vista de un proceso (PID, red, montajes, usuarios). Clave: es el mecanismo central de aislamiento del contenedor.</a:t>
+            </a:r>
+          </a:p>
+          <a:p>
+            <a:pPr>
+              <a:spcAft>
+                <a:spcPts val="600"/>
+              </a:spcAft>
+            </a:pPr>
+            <a:r>
+              <a:rPr sz="1500">
+                <a:solidFill>
+                  <a:srgbClr val="22282E"/>
+                </a:solidFill>
+              </a:rPr>
+              <a:t>•  cgroup: limita recursos (CPU, memoria, PIDs). Clave: previene abuso de recursos y algunas denegaciones de servicio.</a:t>
+            </a:r>
+          </a:p>
+          <a:p>
+            <a:pPr>
+              <a:spcAft>
+                <a:spcPts val="600"/>
+              </a:spcAft>
+            </a:pPr>
+            <a:r>
+              <a:rPr sz="1500">
+                <a:solidFill>
+                  <a:srgbClr val="22282E"/>
+                </a:solidFill>
+              </a:rPr>
+              <a:t>•  Capability: privilegio granular del kernel (p. ej. CAPNETADMIN). Clave: recórtalas con --cap-drop=ALL y añade solo las necesarias.</a:t>
+            </a:r>
+          </a:p>
+          <a:p>
+            <a:pPr>
+              <a:spcAft>
+                <a:spcPts val="600"/>
+              </a:spcAft>
+            </a:pPr>
+            <a:r>
+              <a:rPr sz="1500">
+                <a:solidFill>
+                  <a:srgbClr val="22282E"/>
+                </a:solidFill>
+              </a:rPr>
+              <a:t>•  Contenedor privilegiado: modo que amplía dispositivos, capabilities y acceso respecto del perfil normal. Clave: aumenta sustancialmente rutas hacia el host y exige justificación excepcional.</a:t>
+            </a:r>
+          </a:p>
+          <a:p>
+            <a:pPr>
+              <a:spcAft>
+                <a:spcPts val="600"/>
+              </a:spcAft>
+            </a:pPr>
+            <a:r>
+              <a:rPr sz="1500">
+                <a:solidFill>
+                  <a:srgbClr val="22282E"/>
+                </a:solidFill>
+              </a:rPr>
+              <a:t>•  Multi-stage build: compilar en una etapa y copiar artefactos seleccionados a otra. Clave: reduce toolchain final; no elimina secretos persistidos por comandos o archivos copiados incorrectamente.</a:t>
+            </a:r>
+          </a:p>
+          <a:p>
+            <a:pPr>
+              <a:spcAft>
+                <a:spcPts val="600"/>
+              </a:spcAft>
+            </a:pPr>
+            <a:r>
+              <a:rPr sz="1500">
+                <a:solidFill>
+                  <a:srgbClr val="22282E"/>
+                </a:solidFill>
+              </a:rPr>
+              <a:t>•  Distroless / scratch: imágenes con conjunto mínimo de runtime. Clave: reducen componentes, pero complican diagnóstico y no eliminan vulnerabilidades de la aplicación.</a:t>
+            </a:r>
+          </a:p>
+          <a:p>
+            <a:pPr>
+              <a:spcAft>
+                <a:spcPts val="600"/>
+              </a:spcAft>
+            </a:pPr>
+            <a:r>
+              <a:rPr sz="1500">
+                <a:solidFill>
+                  <a:srgbClr val="22282E"/>
+                </a:solidFill>
+              </a:rPr>
+              <a:t>•  Seccomp: filtra syscalls disponibles al contenedor. Clave: el perfil por defecto ya bloquea syscalls peligrosas.</a:t>
             </a:r>
           </a:p>
         </p:txBody>
@@ -4480,7 +5081,7 @@
                   <a:srgbClr val="0B3D2E"/>
                 </a:solidFill>
               </a:rPr>
-              <a:t>🧪 Laboratorio guiado</a:t>
+              <a:t>🔍 Caso razonado — una aplicación que necesita escribir y escuchar en 80</a:t>
             </a:r>
           </a:p>
         </p:txBody>
@@ -4518,97 +5119,22 @@
                   <a:srgbClr val="22282E"/>
                 </a:solidFill>
               </a:rPr>
-              <a:t>•  Ejecuta docker run -it --rm alpine sh y explora los namespaces con lsns desde el host para ver el aislamiento.</a:t>
-            </a:r>
-          </a:p>
-          <a:p>
-            <a:pPr>
-              <a:spcAft>
-                <a:spcPts val="600"/>
-              </a:spcAft>
-            </a:pPr>
-            <a:r>
-              <a:rPr sz="1500">
-                <a:solidFill>
-                  <a:srgbClr val="22282E"/>
-                </a:solidFill>
-              </a:rPr>
-              <a:t>•  Lanza un contenedor con --privileged y muestra que puede montar el disco del host; borra el contenedor y nunca uses privileged en producción.</a:t>
-            </a:r>
-          </a:p>
-          <a:p>
-            <a:pPr>
-              <a:spcAft>
-                <a:spcPts val="600"/>
-              </a:spcAft>
-            </a:pPr>
-            <a:r>
-              <a:rPr sz="1500">
-                <a:solidFill>
-                  <a:srgbClr val="22282E"/>
-                </a:solidFill>
-              </a:rPr>
-              <a:t>•  Escribe un Dockerfile inseguro (corriendo como root, con secretos en ENV) y pásalo por Hadolint; corrige los hallazgos.</a:t>
-            </a:r>
-          </a:p>
-          <a:p>
-            <a:pPr>
-              <a:spcAft>
-                <a:spcPts val="600"/>
-              </a:spcAft>
-            </a:pPr>
-            <a:r>
-              <a:rPr sz="1500">
-                <a:solidFill>
-                  <a:srgbClr val="22282E"/>
-                </a:solidFill>
-              </a:rPr>
-              <a:t>•  Refactoriza a un multi-stage build con imagen final distroless o scratch, usuario no root (USER 1000) y sin secretos.</a:t>
-            </a:r>
-          </a:p>
-          <a:p>
-            <a:pPr>
-              <a:spcAft>
-                <a:spcPts val="600"/>
-              </a:spcAft>
-            </a:pPr>
-            <a:r>
-              <a:rPr sz="1500">
-                <a:solidFill>
-                  <a:srgbClr val="22282E"/>
-                </a:solidFill>
-              </a:rPr>
-              <a:t>•  Escanea ambas imágenes con trivy image y compara el número de CVEs y el tamaño.</a:t>
-            </a:r>
-          </a:p>
-          <a:p>
-            <a:pPr>
-              <a:spcAft>
-                <a:spcPts val="600"/>
-              </a:spcAft>
-            </a:pPr>
-            <a:r>
-              <a:rPr sz="1500">
-                <a:solidFill>
-                  <a:srgbClr val="22282E"/>
-                </a:solidFill>
-              </a:rPr>
-              <a:t>•  Ejecuta el contenedor endurecido: docker run --read-only --cap-drop=ALL --security-opt=no-new-privileges --user 1000 miimagen.</a:t>
-            </a:r>
-          </a:p>
-          <a:p>
-            <a:pPr>
-              <a:spcAft>
-                <a:spcPts val="600"/>
-              </a:spcAft>
-            </a:pPr>
-            <a:r>
-              <a:rPr sz="1500">
-                <a:solidFill>
-                  <a:srgbClr val="22282E"/>
-                </a:solidFill>
-              </a:rPr>
-              <a:t>•  Audita el host con Docker Bench for Security y corrige al menos tres hallazgos (daemon con TLS, userns-remap, logging).</a:t>
+              <a:t>•  La imagen original corre como root, contiene compilador y escribe en /tmp y /var/cache/app. El equipo usa multi-stage, crea un UID no root y monta tmpfs solo en ambas rutas. En kernels modernos puede…</a:t>
+            </a:r>
+          </a:p>
+          <a:p>
+            <a:pPr>
+              <a:spcAft>
+                <a:spcPts val="600"/>
+              </a:spcAft>
+            </a:pPr>
+            <a:r>
+              <a:rPr sz="1500">
+                <a:solidFill>
+                  <a:srgbClr val="22282E"/>
+                </a:solidFill>
+              </a:rPr>
+              <a:t>•  Trivy encuentra una CVE en una biblioteca que la app no carga. La excepción no se cierra como «falso positivo» sin más: documenta digest, paquete, ruta, análisis de alcance, fecha de revisión y…</a:t>
             </a:r>
           </a:p>
         </p:txBody>
@@ -4659,7 +5185,7 @@
                   <a:srgbClr val="0B3D2E"/>
                 </a:solidFill>
               </a:rPr>
-              <a:t>✍️ Ejercicios</a:t>
+              <a:t>✅ Criterio de dominio</a:t>
             </a:r>
           </a:p>
         </p:txBody>
@@ -4697,82 +5223,7 @@
                   <a:srgbClr val="22282E"/>
                 </a:solidFill>
               </a:rPr>
-              <a:t>•  Enumera las capabilities por defecto de un contenedor y explica cuáles quitarías.</a:t>
-            </a:r>
-          </a:p>
-          <a:p>
-            <a:pPr>
-              <a:spcAft>
-                <a:spcPts val="600"/>
-              </a:spcAft>
-            </a:pPr>
-            <a:r>
-              <a:rPr sz="1500">
-                <a:solidFill>
-                  <a:srgbClr val="22282E"/>
-                </a:solidFill>
-              </a:rPr>
-              <a:t>•  Convierte una imagen basada en ubuntu a una distroless y mide la reducción de CVEs.</a:t>
-            </a:r>
-          </a:p>
-          <a:p>
-            <a:pPr>
-              <a:spcAft>
-                <a:spcPts val="600"/>
-              </a:spcAft>
-            </a:pPr>
-            <a:r>
-              <a:rPr sz="1500">
-                <a:solidFill>
-                  <a:srgbClr val="22282E"/>
-                </a:solidFill>
-              </a:rPr>
-              <a:t>•  Configura un contenedor con sistema de archivos read-only y un volumen escribible acotado.</a:t>
-            </a:r>
-          </a:p>
-          <a:p>
-            <a:pPr>
-              <a:spcAft>
-                <a:spcPts val="600"/>
-              </a:spcAft>
-            </a:pPr>
-            <a:r>
-              <a:rPr sz="1500">
-                <a:solidFill>
-                  <a:srgbClr val="22282E"/>
-                </a:solidFill>
-              </a:rPr>
-              <a:t>•  Escribe un .dockerignore que evite filtrar .env y .git.</a:t>
-            </a:r>
-          </a:p>
-          <a:p>
-            <a:pPr>
-              <a:spcAft>
-                <a:spcPts val="600"/>
-              </a:spcAft>
-            </a:pPr>
-            <a:r>
-              <a:rPr sz="1500">
-                <a:solidFill>
-                  <a:srgbClr val="22282E"/>
-                </a:solidFill>
-              </a:rPr>
-              <a:t>•  Firma una imagen y verifica su firma antes de desplegar.</a:t>
-            </a:r>
-          </a:p>
-          <a:p>
-            <a:pPr>
-              <a:spcAft>
-                <a:spcPts val="600"/>
-              </a:spcAft>
-            </a:pPr>
-            <a:r>
-              <a:rPr sz="1500">
-                <a:solidFill>
-                  <a:srgbClr val="22282E"/>
-                </a:solidFill>
-              </a:rPr>
-              <a:t>•  Explica por qué un contenedor comprometido puede afectar al host y cómo mitigarlo.</a:t>
+              <a:t>•  Dominas la clase cuando puedes explicar qué aísla cada mecanismo, reconstruir una imagen sin secretos en capas, fijarla por digest y ejecutar la carga con usuario, mounts, capabilities y perfiles…</a:t>
             </a:r>
           </a:p>
         </p:txBody>
@@ -4823,7 +5274,7 @@
                   <a:srgbClr val="0B3D2E"/>
                 </a:solidFill>
               </a:rPr>
-              <a:t>📝 Reto verificable</a:t>
+              <a:t>🧰 Herramientas y preparación</a:t>
             </a:r>
           </a:p>
         </p:txBody>
@@ -4861,52 +5312,52 @@
                   <a:srgbClr val="22282E"/>
                 </a:solidFill>
               </a:rPr>
-              <a:t>•  Toma una imagen de aplicación real y prodúcela endurecida: multi-stage, base mínima, usuario no root,</a:t>
-            </a:r>
-          </a:p>
-          <a:p>
-            <a:pPr>
-              <a:spcAft>
-                <a:spcPts val="600"/>
-              </a:spcAft>
-            </a:pPr>
-            <a:r>
-              <a:rPr sz="1500">
-                <a:solidFill>
-                  <a:srgbClr val="22282E"/>
-                </a:solidFill>
-              </a:rPr>
-              <a:t>•  sin secretos, y ejecución con capabilities recortadas y read-only.</a:t>
-            </a:r>
-          </a:p>
-          <a:p>
-            <a:pPr>
-              <a:spcAft>
-                <a:spcPts val="600"/>
-              </a:spcAft>
-            </a:pPr>
-            <a:r>
-              <a:rPr sz="1500">
-                <a:solidFill>
-                  <a:srgbClr val="22282E"/>
-                </a:solidFill>
-              </a:rPr>
-              <a:t>•  Criterio de aceptación: trivy image no reporta CVEs CRÍTICAS ni secretos en la imagen final, la</a:t>
-            </a:r>
-          </a:p>
-          <a:p>
-            <a:pPr>
-              <a:spcAft>
-                <a:spcPts val="600"/>
-              </a:spcAft>
-            </a:pPr>
-            <a:r>
-              <a:rPr sz="1500">
-                <a:solidFill>
-                  <a:srgbClr val="22282E"/>
-                </a:solidFill>
-              </a:rPr>
-              <a:t>•  imagen corre como UID no root, y docker inspect confirma CapDrop: [ALL] y ReadonlyRootfs: true.</a:t>
+              <a:t>•  Docker Engine en un host Linux de laboratorio.</a:t>
+            </a:r>
+          </a:p>
+          <a:p>
+            <a:pPr>
+              <a:spcAft>
+                <a:spcPts val="600"/>
+              </a:spcAft>
+            </a:pPr>
+            <a:r>
+              <a:rPr sz="1500">
+                <a:solidFill>
+                  <a:srgbClr val="22282E"/>
+                </a:solidFill>
+              </a:rPr>
+              <a:t>•  Trivy para escaneo de imágenes/filesystem: docker run aquasec/trivy.</a:t>
+            </a:r>
+          </a:p>
+          <a:p>
+            <a:pPr>
+              <a:spcAft>
+                <a:spcPts val="600"/>
+              </a:spcAft>
+            </a:pPr>
+            <a:r>
+              <a:rPr sz="1500">
+                <a:solidFill>
+                  <a:srgbClr val="22282E"/>
+                </a:solidFill>
+              </a:rPr>
+              <a:t>•  Docker Bench for Security para auditar el host según CIS.</a:t>
+            </a:r>
+          </a:p>
+          <a:p>
+            <a:pPr>
+              <a:spcAft>
+                <a:spcPts val="600"/>
+              </a:spcAft>
+            </a:pPr>
+            <a:r>
+              <a:rPr sz="1500">
+                <a:solidFill>
+                  <a:srgbClr val="22282E"/>
+                </a:solidFill>
+              </a:rPr>
+              <a:t>•  Hadolint para lint de Dockerfiles.</a:t>
             </a:r>
           </a:p>
         </p:txBody>
